--- a/src/srstudio/assets/poster_templates/legacy/models/SEGUNDA_DA_LIMPEZA_1_PRECO_COM_LIMITE.pptx
+++ b/src/srstudio/assets/poster_templates/legacy/models/SEGUNDA_DA_LIMPEZA_1_PRECO_COM_LIMITE.pptx
@@ -3407,7 +3407,7 @@
 </file>
 
 <file path=ppt/slides/slide1.xml><?xml version="1.0" encoding="utf-8"?>
-<p:sld xmlns:a="http://schemas.openxmlformats.org/drawingml/2006/main" xmlns:r="http://schemas.openxmlformats.org/officeDocument/2006/relationships" xmlns:p="http://schemas.openxmlformats.org/presentationml/2006/main">
+<p:sld xmlns:a="http://schemas.openxmlformats.org/drawingml/2006/main" xmlns:r="http://schemas.openxmlformats.org/officeDocument/2006/relationships" xmlns:p="http://schemas.openxmlformats.org/presentationml/2006/main" showMasterSp="1">
   <p:cSld>
     <p:spTree>
       <p:nvGrpSpPr>
@@ -3439,7 +3439,7 @@
         </p:nvSpPr>
         <p:spPr bwMode="auto">
           <a:xfrm>
-            <a:off x="132004" y="5328230"/>
+            <a:off x="222753" y="5907862"/>
             <a:ext cx="750188" cy="465704"/>
           </a:xfrm>
           <a:prstGeom prst="rect">
@@ -3484,13 +3484,13 @@
             </a:extLst>
           </p:cNvPr>
           <p:cNvSpPr>
-            <a:spLocks noChangeArrowheads="1" noChangeShapeType="1"/>
+            <a:spLocks noChangeArrowheads="1" noChangeShapeType="1" noTextEdit="1"/>
           </p:cNvSpPr>
           <p:nvPr/>
         </p:nvSpPr>
         <p:spPr bwMode="auto">
           <a:xfrm>
-            <a:off x="132004" y="7979727"/>
+            <a:off x="222753" y="8559359"/>
             <a:ext cx="1525810" cy="730557"/>
           </a:xfrm>
           <a:prstGeom prst="rect">
@@ -3535,13 +3535,13 @@
             </a:extLst>
           </p:cNvPr>
           <p:cNvSpPr>
-            <a:spLocks noChangeArrowheads="1" noChangeShapeType="1"/>
+            <a:spLocks noChangeArrowheads="1" noChangeShapeType="1" noTextEdit="1"/>
           </p:cNvSpPr>
           <p:nvPr/>
         </p:nvSpPr>
         <p:spPr bwMode="auto">
           <a:xfrm>
-            <a:off x="717688" y="5663995"/>
+            <a:off x="808437" y="6243627"/>
             <a:ext cx="5601074" cy="2214809"/>
           </a:xfrm>
           <a:prstGeom prst="rect">
@@ -3587,49 +3587,6 @@
           </a:p>
         </p:txBody>
       </p:sp>
-      <p:cxnSp>
-        <p:nvCxnSpPr>
-          <p:cNvPr id="19" name="Conector reto 18">
-            <a:extLst>
-              <a:ext uri="{FF2B5EF4-FFF2-40B4-BE49-F238E27FC236}">
-                <a16:creationId xmlns:a16="http://schemas.microsoft.com/office/drawing/2014/main" id="{0476FEC4-224F-41A1-8421-3CF267C4522B}"/>
-              </a:ext>
-            </a:extLst>
-          </p:cNvPr>
-          <p:cNvCxnSpPr>
-            <a:cxnSpLocks/>
-          </p:cNvCxnSpPr>
-          <p:nvPr/>
-        </p:nvCxnSpPr>
-        <p:spPr>
-          <a:xfrm flipH="1">
-            <a:off x="1110990" y="1798438"/>
-            <a:ext cx="4661071" cy="0"/>
-          </a:xfrm>
-          <a:prstGeom prst="line">
-            <a:avLst/>
-          </a:prstGeom>
-          <a:ln w="28575">
-            <a:solidFill>
-              <a:schemeClr val="tx1"/>
-            </a:solidFill>
-          </a:ln>
-        </p:spPr>
-        <p:style>
-          <a:lnRef idx="1">
-            <a:schemeClr val="accent1"/>
-          </a:lnRef>
-          <a:fillRef idx="0">
-            <a:schemeClr val="accent1"/>
-          </a:fillRef>
-          <a:effectRef idx="0">
-            <a:schemeClr val="accent1"/>
-          </a:effectRef>
-          <a:fontRef idx="minor">
-            <a:schemeClr val="tx1"/>
-          </a:fontRef>
-        </p:style>
-      </p:cxnSp>
       <p:sp>
         <p:nvSpPr>
           <p:cNvPr id="20" name="Retângulo 19">
@@ -3692,7 +3649,7 @@
           <p:nvPr/>
         </p:nvPicPr>
         <p:blipFill>
-          <a:blip r:embed="rId3">
+          <a:blip r:embed="rIdReference1">
             <a:extLst>
               <a:ext uri="{28A0092B-C50C-407E-A947-70E740481C1C}">
                 <a14:useLocalDpi xmlns:a14="http://schemas.microsoft.com/office/drawing/2010/main" val="0"/>
@@ -3706,7 +3663,7 @@
         </p:blipFill>
         <p:spPr bwMode="auto">
           <a:xfrm>
-            <a:off x="5284526" y="8789466"/>
+            <a:off x="7646044" y="8622576"/>
             <a:ext cx="1454618" cy="953792"/>
           </a:xfrm>
           <a:prstGeom prst="rect">
@@ -3790,57 +3747,6 @@
       </p:sp>
       <p:sp>
         <p:nvSpPr>
-          <p:cNvPr id="24" name="WordArt 4">
-            <a:extLst>
-              <a:ext uri="{FF2B5EF4-FFF2-40B4-BE49-F238E27FC236}">
-                <a16:creationId xmlns:a16="http://schemas.microsoft.com/office/drawing/2014/main" id="{E8DEEAE6-C9E7-FBCF-BBD5-032AE254EB02}"/>
-              </a:ext>
-            </a:extLst>
-          </p:cNvPr>
-          <p:cNvSpPr>
-            <a:spLocks noChangeArrowheads="1" noChangeShapeType="1" noTextEdit="1"/>
-          </p:cNvSpPr>
-          <p:nvPr/>
-        </p:nvSpPr>
-        <p:spPr bwMode="auto">
-          <a:xfrm>
-            <a:off x="1098464" y="128964"/>
-            <a:ext cx="4661071" cy="1679113"/>
-          </a:xfrm>
-          <a:prstGeom prst="rect">
-            <a:avLst/>
-          </a:prstGeom>
-        </p:spPr>
-        <p:txBody>
-          <a:bodyPr wrap="none" fromWordArt="1">
-            <a:prstTxWarp prst="textPlain">
-              <a:avLst>
-                <a:gd name="adj" fmla="val 50000"/>
-              </a:avLst>
-            </a:prstTxWarp>
-          </a:bodyPr>
-          <a:lstStyle/>
-          <a:p>
-            <a:pPr algn="ctr"/>
-            <a:r>
-              <a:rPr lang="pt-BR" sz="4592" kern="10" dirty="0">
-                <a:ln w="9525">
-                  <a:solidFill>
-                    <a:schemeClr val="tx1"/>
-                  </a:solidFill>
-                  <a:round/>
-                  <a:headEnd/>
-                  <a:tailEnd/>
-                </a:ln>
-                <a:latin typeface="Algerian" panose="04020705040A02060702" pitchFamily="82" charset="0"/>
-              </a:rPr>
-              <a:t>OFERTA</a:t>
-            </a:r>
-          </a:p>
-        </p:txBody>
-      </p:sp>
-      <p:sp>
-        <p:nvSpPr>
           <p:cNvPr id="6" name="SR_PRODUTO">
             <a:extLst>
               <a:ext uri="{FF2B5EF4-FFF2-40B4-BE49-F238E27FC236}">
@@ -3849,13 +3755,13 @@
             </a:extLst>
           </p:cNvPr>
           <p:cNvSpPr>
-            <a:spLocks noChangeArrowheads="1" noChangeShapeType="1"/>
+            <a:spLocks noChangeArrowheads="1" noChangeShapeType="1" noTextEdit="1"/>
           </p:cNvSpPr>
           <p:nvPr/>
         </p:nvSpPr>
         <p:spPr bwMode="auto">
           <a:xfrm>
-            <a:off x="355311" y="2266520"/>
+            <a:off x="446060" y="2846152"/>
             <a:ext cx="6147378" cy="2646834"/>
           </a:xfrm>
           <a:prstGeom prst="rect">
@@ -3917,13 +3823,13 @@
             </a:extLst>
           </p:cNvPr>
           <p:cNvSpPr>
-            <a:spLocks noChangeArrowheads="1" noChangeShapeType="1"/>
+            <a:spLocks noChangeArrowheads="1" noChangeShapeType="1" noTextEdit="1"/>
           </p:cNvSpPr>
           <p:nvPr/>
         </p:nvSpPr>
         <p:spPr bwMode="auto">
           <a:xfrm>
-            <a:off x="2582123" y="8314821"/>
+            <a:off x="2672872" y="8894453"/>
             <a:ext cx="1718806" cy="474645"/>
           </a:xfrm>
           <a:prstGeom prst="rect">
@@ -3985,13 +3891,13 @@
             </a:extLst>
           </p:cNvPr>
           <p:cNvSpPr>
-            <a:spLocks noChangeArrowheads="1" noChangeShapeType="1"/>
+            <a:spLocks noChangeArrowheads="1" noChangeShapeType="1" noTextEdit="1"/>
           </p:cNvSpPr>
           <p:nvPr/>
         </p:nvSpPr>
         <p:spPr bwMode="auto">
           <a:xfrm>
-            <a:off x="1949575" y="7986326"/>
+            <a:off x="2040324" y="8565958"/>
             <a:ext cx="2805455" cy="298585"/>
           </a:xfrm>
           <a:prstGeom prst="rect">
@@ -4042,7 +3948,7 @@
         </p:nvSpPr>
         <p:spPr bwMode="auto">
           <a:xfrm>
-            <a:off x="2115499" y="8795689"/>
+            <a:off x="2206248" y="9375321"/>
             <a:ext cx="2652057" cy="140199"/>
           </a:xfrm>
           <a:prstGeom prst="rect">
@@ -4093,7 +3999,7 @@
         </p:nvSpPr>
         <p:spPr bwMode="auto">
           <a:xfrm>
-            <a:off x="2192197" y="8926636"/>
+            <a:off x="2282946" y="9506268"/>
             <a:ext cx="2652057" cy="140199"/>
           </a:xfrm>
           <a:prstGeom prst="rect">
@@ -4142,7 +4048,7 @@
         </p:nvSpPr>
         <p:spPr>
           <a:xfrm>
-            <a:off x="1027544" y="5020876"/>
+            <a:off x="1118293" y="5600508"/>
             <a:ext cx="5145866" cy="495786"/>
           </a:xfrm>
           <a:prstGeom prst="rect">
